--- a/lectures/lecture7/lecture7.pptx
+++ b/lectures/lecture7/lecture7.pptx
@@ -118,7 +118,7 @@
   <pc:docChgLst>
     <pc:chgData name="Toby Donaldson" userId="2e6e5431-bb17-4c41-9985-d39c50d83c73" providerId="ADAL" clId="{F31BC264-820E-54C4-A6D1-F92AF9CC222E}"/>
     <pc:docChg chg="undo custSel addSld delSld modSld sldOrd">
-      <pc:chgData name="Toby Donaldson" userId="2e6e5431-bb17-4c41-9985-d39c50d83c73" providerId="ADAL" clId="{F31BC264-820E-54C4-A6D1-F92AF9CC222E}" dt="2026-05-26T19:44:30.405" v="1979" actId="20578"/>
+      <pc:chgData name="Toby Donaldson" userId="2e6e5431-bb17-4c41-9985-d39c50d83c73" providerId="ADAL" clId="{F31BC264-820E-54C4-A6D1-F92AF9CC222E}" dt="2026-05-26T20:16:00.845" v="1988" actId="20577"/>
       <pc:docMkLst>
         <pc:docMk/>
       </pc:docMkLst>
@@ -153,7 +153,7 @@
         </pc:spChg>
       </pc:sldChg>
       <pc:sldChg chg="modSp new mod ord">
-        <pc:chgData name="Toby Donaldson" userId="2e6e5431-bb17-4c41-9985-d39c50d83c73" providerId="ADAL" clId="{F31BC264-820E-54C4-A6D1-F92AF9CC222E}" dt="2026-05-26T19:44:30.405" v="1979" actId="20578"/>
+        <pc:chgData name="Toby Donaldson" userId="2e6e5431-bb17-4c41-9985-d39c50d83c73" providerId="ADAL" clId="{F31BC264-820E-54C4-A6D1-F92AF9CC222E}" dt="2026-05-26T20:16:00.845" v="1988" actId="20577"/>
         <pc:sldMkLst>
           <pc:docMk/>
           <pc:sldMk cId="1158529909" sldId="264"/>
@@ -167,7 +167,7 @@
           </ac:spMkLst>
         </pc:spChg>
         <pc:spChg chg="mod">
-          <ac:chgData name="Toby Donaldson" userId="2e6e5431-bb17-4c41-9985-d39c50d83c73" providerId="ADAL" clId="{F31BC264-820E-54C4-A6D1-F92AF9CC222E}" dt="2026-05-26T19:44:24.089" v="1978" actId="20577"/>
+          <ac:chgData name="Toby Donaldson" userId="2e6e5431-bb17-4c41-9985-d39c50d83c73" providerId="ADAL" clId="{F31BC264-820E-54C4-A6D1-F92AF9CC222E}" dt="2026-05-26T20:16:00.845" v="1988" actId="20577"/>
           <ac:spMkLst>
             <pc:docMk/>
             <pc:sldMk cId="1158529909" sldId="264"/>
@@ -3531,7 +3531,15 @@
             </a:pPr>
             <a:r>
               <a:rPr lang="en-US" dirty="0"/>
-              <a:t>You have 200 exam papers random order and want to find Tina Belcher’s paper.</a:t>
+              <a:t>You have 200 exam papers in random order </a:t>
+            </a:r>
+            <a:r>
+              <a:rPr lang="en-US"/>
+              <a:t>and need </a:t>
+            </a:r>
+            <a:r>
+              <a:rPr lang="en-US" dirty="0"/>
+              <a:t>to find Tina Belcher’s paper.</a:t>
             </a:r>
           </a:p>
           <a:p>
